--- a/Viernes-19/S02_Viernes-19_3_Reel_La-espera_9x16.pptx
+++ b/Viernes-19/S02_Viernes-19_3_Reel_La-espera_9x16.pptx
@@ -7,6 +7,7 @@
   <p:sldIdLst>
     <p:sldId id="256" r:id="rId7"/>
     <p:sldId id="257" r:id="rId8"/>
+    <p:sldId id="258" r:id="rId9"/>
   </p:sldIdLst>
   <p:sldSz cx="8229600" cy="14630400" type="screen4x3"/>
   <p:notesSz cx="6858000" cy="9144000"/>
@@ -3409,6 +3410,185 @@
         </p:nvSpPr>
         <p:spPr>
           <a:xfrm>
+            <a:off x="777240" y="1280160"/>
+            <a:ext cx="1371600" cy="146304"/>
+          </a:xfrm>
+          <a:prstGeom prst="rect">
+            <a:avLst/>
+          </a:prstGeom>
+          <a:solidFill>
+            <a:srgbClr val="7C3AED"/>
+          </a:solidFill>
+          <a:ln>
+            <a:noFill/>
+          </a:ln>
+          <a:effectLst/>
+        </p:spPr>
+        <p:style>
+          <a:lnRef idx="1">
+            <a:schemeClr val="accent1"/>
+          </a:lnRef>
+          <a:fillRef idx="3">
+            <a:schemeClr val="accent1"/>
+          </a:fillRef>
+          <a:effectRef idx="2">
+            <a:schemeClr val="accent1"/>
+          </a:effectRef>
+          <a:fontRef idx="minor">
+            <a:schemeClr val="lt1"/>
+          </a:fontRef>
+        </p:style>
+        <p:txBody>
+          <a:bodyPr rtlCol="0" anchor="ctr"/>
+          <a:lstStyle/>
+          <a:p>
+            <a:pPr algn="ctr"/>
+          </a:p>
+        </p:txBody>
+      </p:sp>
+      <p:sp>
+        <p:nvSpPr>
+          <p:cNvPr id="5" name="TextBox 4"/>
+          <p:cNvSpPr txBox="1"/>
+          <p:nvPr/>
+        </p:nvSpPr>
+        <p:spPr>
+          <a:xfrm>
+            <a:off x="777240" y="1737360"/>
+            <a:ext cx="6675120" cy="10516108"/>
+          </a:xfrm>
+          <a:prstGeom prst="rect">
+            <a:avLst/>
+          </a:prstGeom>
+          <a:noFill/>
+        </p:spPr>
+        <p:txBody>
+          <a:bodyPr wrap="square" anchor="t" lIns="0" rIns="0" tIns="0" bIns="0">
+            <a:spAutoFit/>
+          </a:bodyPr>
+          <a:lstStyle/>
+          <a:p>
+            <a:pPr algn="l">
+              <a:lnSpc>
+                <a:spcPct val="100000"/>
+              </a:lnSpc>
+            </a:pPr>
+            <a:r>
+              <a:rPr sz="9200" b="1">
+                <a:solidFill>
+                  <a:srgbClr val="FFFFFF"/>
+                </a:solidFill>
+                <a:latin typeface="Inter"/>
+              </a:rPr>
+              <a:t>Asesoría legal 100% en línea, ya en early access.</a:t>
+            </a:r>
+          </a:p>
+        </p:txBody>
+      </p:sp>
+    </p:spTree>
+  </p:cSld>
+  <p:clrMapOvr>
+    <a:masterClrMapping/>
+  </p:clrMapOvr>
+</p:sld>
+</file>
+
+<file path=ppt/slides/slide3.xml><?xml version="1.0" encoding="utf-8"?>
+<p:sld xmlns:a="http://schemas.openxmlformats.org/drawingml/2006/main" xmlns:p="http://schemas.openxmlformats.org/presentationml/2006/main" xmlns:r="http://schemas.openxmlformats.org/officeDocument/2006/relationships">
+  <p:cSld>
+    <p:bg>
+      <p:bgPr>
+        <a:solidFill>
+          <a:srgbClr val="0F172A"/>
+        </a:solidFill>
+        <a:effectLst/>
+      </p:bgPr>
+    </p:bg>
+    <p:spTree>
+      <p:nvGrpSpPr>
+        <p:cNvPr id="1" name=""/>
+        <p:cNvGrpSpPr/>
+        <p:nvPr/>
+      </p:nvGrpSpPr>
+      <p:grpSpPr/>
+      <p:pic>
+        <p:nvPicPr>
+          <p:cNvPr id="2" name="Picture 1" descr="reloj.png"/>
+          <p:cNvPicPr>
+            <a:picLocks noChangeAspect="1"/>
+          </p:cNvPicPr>
+          <p:nvPr/>
+        </p:nvPicPr>
+        <p:blipFill>
+          <a:blip r:embed="rId2"/>
+          <a:stretch>
+            <a:fillRect/>
+          </a:stretch>
+        </p:blipFill>
+        <p:spPr>
+          <a:xfrm>
+            <a:off x="0" y="-57150"/>
+            <a:ext cx="8229600" cy="14744700"/>
+          </a:xfrm>
+          <a:prstGeom prst="rect">
+            <a:avLst/>
+          </a:prstGeom>
+        </p:spPr>
+      </p:pic>
+      <p:sp>
+        <p:nvSpPr>
+          <p:cNvPr id="3" name="Rectangle 2"/>
+          <p:cNvSpPr/>
+          <p:nvPr/>
+        </p:nvSpPr>
+        <p:spPr>
+          <a:xfrm>
+            <a:off x="0" y="0"/>
+            <a:ext cx="8229600" cy="14630400"/>
+          </a:xfrm>
+          <a:prstGeom prst="rect">
+            <a:avLst/>
+          </a:prstGeom>
+          <a:solidFill>
+            <a:srgbClr val="0F172A">
+              <a:alpha val="50000"/>
+            </a:srgbClr>
+          </a:solidFill>
+          <a:ln>
+            <a:noFill/>
+          </a:ln>
+          <a:effectLst/>
+        </p:spPr>
+        <p:style>
+          <a:lnRef idx="1">
+            <a:schemeClr val="accent1"/>
+          </a:lnRef>
+          <a:fillRef idx="3">
+            <a:schemeClr val="accent1"/>
+          </a:fillRef>
+          <a:effectRef idx="2">
+            <a:schemeClr val="accent1"/>
+          </a:effectRef>
+          <a:fontRef idx="minor">
+            <a:schemeClr val="lt1"/>
+          </a:fontRef>
+        </p:style>
+        <p:txBody>
+          <a:bodyPr rtlCol="0" anchor="ctr"/>
+          <a:lstStyle/>
+          <a:p>
+            <a:pPr algn="ctr"/>
+          </a:p>
+        </p:txBody>
+      </p:sp>
+      <p:sp>
+        <p:nvSpPr>
+          <p:cNvPr id="4" name="Rectangle 3"/>
+          <p:cNvSpPr/>
+          <p:nvPr/>
+        </p:nvSpPr>
+        <p:spPr>
+          <a:xfrm>
             <a:off x="0" y="13258800"/>
             <a:ext cx="8229600" cy="1371600"/>
           </a:xfrm>
@@ -3465,7 +3645,7 @@
         </p:nvSpPr>
         <p:spPr>
           <a:xfrm>
-            <a:off x="777240" y="4155186"/>
+            <a:off x="777240" y="3901186"/>
             <a:ext cx="1371600" cy="146304"/>
           </a:xfrm>
           <a:prstGeom prst="rect">
@@ -3509,8 +3689,8 @@
         </p:nvSpPr>
         <p:spPr>
           <a:xfrm>
-            <a:off x="777240" y="4612386"/>
-            <a:ext cx="6675120" cy="4674108"/>
+            <a:off x="777240" y="4358386"/>
+            <a:ext cx="6675120" cy="5182108"/>
           </a:xfrm>
           <a:prstGeom prst="rect">
             <a:avLst/>
@@ -3529,13 +3709,13 @@
               </a:lnSpc>
             </a:pPr>
             <a:r>
-              <a:rPr sz="9200" b="1">
+              <a:rPr sz="7700" b="1">
                 <a:solidFill>
                   <a:srgbClr val="FFFFFF"/>
                 </a:solidFill>
                 <a:latin typeface="Inter"/>
               </a:rPr>
-              <a:t>22 de junio.</a:t>
+              <a:t>Lanzamiento oficial: 22 de junio.</a:t>
             </a:r>
           </a:p>
         </p:txBody>
@@ -3543,6 +3723,45 @@
       <p:sp>
         <p:nvSpPr>
           <p:cNvPr id="7" name="TextBox 6"/>
+          <p:cNvSpPr txBox="1"/>
+          <p:nvPr/>
+        </p:nvSpPr>
+        <p:spPr>
+          <a:xfrm>
+            <a:off x="777240" y="9540494"/>
+            <a:ext cx="6675120" cy="1118108"/>
+          </a:xfrm>
+          <a:prstGeom prst="rect">
+            <a:avLst/>
+          </a:prstGeom>
+          <a:noFill/>
+        </p:spPr>
+        <p:txBody>
+          <a:bodyPr wrap="square" anchor="t" lIns="0" rIns="0" tIns="0" bIns="0">
+            <a:spAutoFit/>
+          </a:bodyPr>
+          <a:lstStyle/>
+          <a:p>
+            <a:pPr algn="l">
+              <a:lnSpc>
+                <a:spcPct val="110000"/>
+              </a:lnSpc>
+            </a:pPr>
+            <a:r>
+              <a:rPr sz="2600" b="0">
+                <a:solidFill>
+                  <a:srgbClr val="FFFFFF"/>
+                </a:solidFill>
+                <a:latin typeface="Inter"/>
+              </a:rPr>
+              <a:t>notaly.com.ve</a:t>
+            </a:r>
+          </a:p>
+        </p:txBody>
+      </p:sp>
+      <p:sp>
+        <p:nvSpPr>
+          <p:cNvPr id="8" name="TextBox 7"/>
           <p:cNvSpPr txBox="1"/>
           <p:nvPr/>
         </p:nvSpPr>

--- a/Viernes-19/S02_Viernes-19_3_Reel_La-espera_9x16.pptx
+++ b/Viernes-19/S02_Viernes-19_3_Reel_La-espera_9x16.pptx
@@ -3410,7 +3410,7 @@
         </p:nvSpPr>
         <p:spPr>
           <a:xfrm>
-            <a:off x="777240" y="1280160"/>
+            <a:off x="777240" y="2694686"/>
             <a:ext cx="1371600" cy="146304"/>
           </a:xfrm>
           <a:prstGeom prst="rect">
@@ -3454,8 +3454,8 @@
         </p:nvSpPr>
         <p:spPr>
           <a:xfrm>
-            <a:off x="777240" y="1737360"/>
-            <a:ext cx="6675120" cy="10516108"/>
+            <a:off x="777240" y="3151886"/>
+            <a:ext cx="6675120" cy="7595108"/>
           </a:xfrm>
           <a:prstGeom prst="rect">
             <a:avLst/>
@@ -3480,7 +3480,7 @@
                 </a:solidFill>
                 <a:latin typeface="Inter"/>
               </a:rPr>
-              <a:t>Asesoría legal 100% en línea, ya en early access.</a:t>
+              <a:t>Asesoría legal 100% en línea.</a:t>
             </a:r>
           </a:p>
         </p:txBody>
